--- a/assets/powerpoints/module-n3-epicerie/A4-ou-aller-acheter.pptx
+++ b/assets/powerpoints/module-n3-epicerie/A4-ou-aller-acheter.pptx
@@ -12053,13 +12053,76 @@
               </a:lnSpc>
             </a:pPr>
             <a:r>
+              <a:rPr sz="2000" b="1" i="0">
+                <a:solidFill>
+                  <a:srgbClr val="4B4F52"/>
+                </a:solidFill>
+                <a:latin typeface="Verdana"/>
+              </a:rPr>
+              <a:t>Chez</a:t>
+            </a:r>
+            <a:r>
               <a:rPr sz="2000" b="0" i="0">
                 <a:solidFill>
                   <a:srgbClr val="4B4F52"/>
                 </a:solidFill>
                 <a:latin typeface="Verdana"/>
               </a:rPr>
-              <a:t>&lt;b&gt;Chez&lt;/b&gt; s'emploie devant une &lt;b&gt;personne&lt;/b&gt; : chez le boucher, chez le boulanger, chez le pharmacien. &lt;b&gt;À&lt;/b&gt; s'emploie devant un &lt;b&gt;lieu&lt;/b&gt; : à la boucherie, à la boulangerie, à l'épicerie, au dépanneur. Les deux sont corrects — mais pas mélangés.</a:t>
+              <a:t> s'emploie devant une </a:t>
+            </a:r>
+            <a:r>
+              <a:rPr sz="2000" b="1" i="0">
+                <a:solidFill>
+                  <a:srgbClr val="4B4F52"/>
+                </a:solidFill>
+                <a:latin typeface="Verdana"/>
+              </a:rPr>
+              <a:t>personne</a:t>
+            </a:r>
+            <a:r>
+              <a:rPr sz="2000" b="0" i="0">
+                <a:solidFill>
+                  <a:srgbClr val="4B4F52"/>
+                </a:solidFill>
+                <a:latin typeface="Verdana"/>
+              </a:rPr>
+              <a:t> : chez le boucher, chez le boulanger, chez le pharmacien. </a:t>
+            </a:r>
+            <a:r>
+              <a:rPr sz="2000" b="1" i="0">
+                <a:solidFill>
+                  <a:srgbClr val="4B4F52"/>
+                </a:solidFill>
+                <a:latin typeface="Verdana"/>
+              </a:rPr>
+              <a:t>À</a:t>
+            </a:r>
+            <a:r>
+              <a:rPr sz="2000" b="0" i="0">
+                <a:solidFill>
+                  <a:srgbClr val="4B4F52"/>
+                </a:solidFill>
+                <a:latin typeface="Verdana"/>
+              </a:rPr>
+              <a:t> s'emploie devant un </a:t>
+            </a:r>
+            <a:r>
+              <a:rPr sz="2000" b="1" i="0">
+                <a:solidFill>
+                  <a:srgbClr val="4B4F52"/>
+                </a:solidFill>
+                <a:latin typeface="Verdana"/>
+              </a:rPr>
+              <a:t>lieu</a:t>
+            </a:r>
+            <a:r>
+              <a:rPr sz="2000" b="0" i="0">
+                <a:solidFill>
+                  <a:srgbClr val="4B4F52"/>
+                </a:solidFill>
+                <a:latin typeface="Verdana"/>
+              </a:rPr>
+              <a:t> : à la boucherie, à la boulangerie, à l'épicerie, au dépanneur. Les deux sont corrects — mais pas mélangés.</a:t>
             </a:r>
           </a:p>
         </p:txBody>
